--- a/skills/positioning-map-pptx/assets/stellar_aiz/positioning-map-template.pptx
+++ b/skills/positioning-map-pptx/assets/stellar_aiz/positioning-map-template.pptx
@@ -153,42 +153,42 @@
 <file path=ppt/changesInfos/changesInfo1.xml><?xml version="1.0" encoding="utf-8"?>
 <pc:chgInfo xmlns:a="http://schemas.openxmlformats.org/drawingml/2006/main" xmlns:r="http://schemas.openxmlformats.org/officeDocument/2006/relationships" xmlns:ac="http://schemas.microsoft.com/office/drawing/2013/main/command" xmlns:pc="http://schemas.microsoft.com/office/powerpoint/2013/main/command">
   <pc:docChgLst>
-    <pc:chgData name="福元 允亮" userId="12e1d508-426e-4c6a-b43b-7681266f9ca9" providerId="ADAL" clId="{4FB9097D-FD44-E242-A68C-2137823CC664}"/>
+    <pc:chgData name="福元 允亮" userId="12e1d508-426e-4c6a-b43b-7681266f9ca9" providerId="ADAL" clId="{3F8738D5-2550-AF4F-981D-A8C1866BE157}"/>
     <pc:docChg chg="undo custSel modSld">
-      <pc:chgData name="福元 允亮" userId="12e1d508-426e-4c6a-b43b-7681266f9ca9" providerId="ADAL" clId="{4FB9097D-FD44-E242-A68C-2137823CC664}" dt="2026-03-12T04:26:49.545" v="184" actId="120"/>
+      <pc:chgData name="福元 允亮" userId="12e1d508-426e-4c6a-b43b-7681266f9ca9" providerId="ADAL" clId="{3F8738D5-2550-AF4F-981D-A8C1866BE157}" dt="2026-03-12T07:19:16.668" v="249" actId="3064"/>
       <pc:docMkLst>
         <pc:docMk/>
       </pc:docMkLst>
       <pc:sldChg chg="addSp delSp modSp mod">
-        <pc:chgData name="福元 允亮" userId="12e1d508-426e-4c6a-b43b-7681266f9ca9" providerId="ADAL" clId="{4FB9097D-FD44-E242-A68C-2137823CC664}" dt="2026-03-12T04:26:49.545" v="184" actId="120"/>
+        <pc:chgData name="福元 允亮" userId="12e1d508-426e-4c6a-b43b-7681266f9ca9" providerId="ADAL" clId="{3F8738D5-2550-AF4F-981D-A8C1866BE157}" dt="2026-03-12T07:19:16.668" v="249" actId="3064"/>
         <pc:sldMkLst>
           <pc:docMk/>
           <pc:sldMk cId="3001053428" sldId="2147480764"/>
         </pc:sldMkLst>
         <pc:spChg chg="mod">
-          <ac:chgData name="福元 允亮" userId="12e1d508-426e-4c6a-b43b-7681266f9ca9" providerId="ADAL" clId="{4FB9097D-FD44-E242-A68C-2137823CC664}" dt="2026-03-12T01:15:21.182" v="127" actId="948"/>
+          <ac:chgData name="福元 允亮" userId="12e1d508-426e-4c6a-b43b-7681266f9ca9" providerId="ADAL" clId="{3F8738D5-2550-AF4F-981D-A8C1866BE157}" dt="2026-03-12T06:53:50.504" v="109" actId="1036"/>
           <ac:spMkLst>
             <pc:docMk/>
             <pc:sldMk cId="3001053428" sldId="2147480764"/>
-            <ac:spMk id="2" creationId="{BA5EF566-D16A-40BE-C039-67C80A2CFA91}"/>
+            <ac:spMk id="7" creationId="{07C5F1D5-1FB6-4AC9-95E6-C0578AC27158}"/>
           </ac:spMkLst>
         </pc:spChg>
-        <pc:spChg chg="mod">
-          <ac:chgData name="福元 允亮" userId="12e1d508-426e-4c6a-b43b-7681266f9ca9" providerId="ADAL" clId="{4FB9097D-FD44-E242-A68C-2137823CC664}" dt="2026-03-12T01:15:23.816" v="173" actId="20577"/>
+        <pc:spChg chg="add mod">
+          <ac:chgData name="福元 允亮" userId="12e1d508-426e-4c6a-b43b-7681266f9ca9" providerId="ADAL" clId="{3F8738D5-2550-AF4F-981D-A8C1866BE157}" dt="2026-03-12T07:19:16.668" v="249" actId="3064"/>
           <ac:spMkLst>
             <pc:docMk/>
             <pc:sldMk cId="3001053428" sldId="2147480764"/>
-            <ac:spMk id="3" creationId="{12D73F1F-49C9-5A45-B9E8-D6F68FC949FD}"/>
+            <ac:spMk id="30" creationId="{6DE39449-59E9-A8C5-988C-A57C3F0FC32F}"/>
           </ac:spMkLst>
         </pc:spChg>
-        <pc:graphicFrameChg chg="add mod modVis">
-          <ac:chgData name="福元 允亮" userId="12e1d508-426e-4c6a-b43b-7681266f9ca9" providerId="ADAL" clId="{4FB9097D-FD44-E242-A68C-2137823CC664}" dt="2026-03-12T01:15:21.236" v="162"/>
-          <ac:graphicFrameMkLst>
+        <pc:cxnChg chg="mod topLvl">
+          <ac:chgData name="福元 允亮" userId="12e1d508-426e-4c6a-b43b-7681266f9ca9" providerId="ADAL" clId="{3F8738D5-2550-AF4F-981D-A8C1866BE157}" dt="2026-03-12T06:53:43.418" v="106" actId="165"/>
+          <ac:cxnSpMkLst>
             <pc:docMk/>
             <pc:sldMk cId="3001053428" sldId="2147480764"/>
-            <ac:graphicFrameMk id="8" creationId="{8B876925-78A3-0D6D-A136-2CE4548C6FDC}"/>
-          </ac:graphicFrameMkLst>
-        </pc:graphicFrameChg>
+            <ac:cxnSpMk id="27" creationId="{7C46F714-70A5-C921-7CCA-8693858A63E8}"/>
+          </ac:cxnSpMkLst>
+        </pc:cxnChg>
       </pc:sldChg>
     </pc:docChg>
   </pc:docChgLst>
@@ -329,46 +329,6 @@
     </pc:docChg>
   </pc:docChgLst>
   <pc:docChgLst>
-    <pc:chgData name="福元 允亮" userId="12e1d508-426e-4c6a-b43b-7681266f9ca9" providerId="ADAL" clId="{3F8738D5-2550-AF4F-981D-A8C1866BE157}"/>
-    <pc:docChg chg="undo custSel modSld">
-      <pc:chgData name="福元 允亮" userId="12e1d508-426e-4c6a-b43b-7681266f9ca9" providerId="ADAL" clId="{3F8738D5-2550-AF4F-981D-A8C1866BE157}" dt="2026-03-12T07:19:16.668" v="249" actId="3064"/>
-      <pc:docMkLst>
-        <pc:docMk/>
-      </pc:docMkLst>
-      <pc:sldChg chg="addSp delSp modSp mod">
-        <pc:chgData name="福元 允亮" userId="12e1d508-426e-4c6a-b43b-7681266f9ca9" providerId="ADAL" clId="{3F8738D5-2550-AF4F-981D-A8C1866BE157}" dt="2026-03-12T07:19:16.668" v="249" actId="3064"/>
-        <pc:sldMkLst>
-          <pc:docMk/>
-          <pc:sldMk cId="3001053428" sldId="2147480764"/>
-        </pc:sldMkLst>
-        <pc:spChg chg="mod">
-          <ac:chgData name="福元 允亮" userId="12e1d508-426e-4c6a-b43b-7681266f9ca9" providerId="ADAL" clId="{3F8738D5-2550-AF4F-981D-A8C1866BE157}" dt="2026-03-12T06:53:50.504" v="109" actId="1036"/>
-          <ac:spMkLst>
-            <pc:docMk/>
-            <pc:sldMk cId="3001053428" sldId="2147480764"/>
-            <ac:spMk id="7" creationId="{07C5F1D5-1FB6-4AC9-95E6-C0578AC27158}"/>
-          </ac:spMkLst>
-        </pc:spChg>
-        <pc:spChg chg="add mod">
-          <ac:chgData name="福元 允亮" userId="12e1d508-426e-4c6a-b43b-7681266f9ca9" providerId="ADAL" clId="{3F8738D5-2550-AF4F-981D-A8C1866BE157}" dt="2026-03-12T07:19:16.668" v="249" actId="3064"/>
-          <ac:spMkLst>
-            <pc:docMk/>
-            <pc:sldMk cId="3001053428" sldId="2147480764"/>
-            <ac:spMk id="30" creationId="{6DE39449-59E9-A8C5-988C-A57C3F0FC32F}"/>
-          </ac:spMkLst>
-        </pc:spChg>
-        <pc:cxnChg chg="mod topLvl">
-          <ac:chgData name="福元 允亮" userId="12e1d508-426e-4c6a-b43b-7681266f9ca9" providerId="ADAL" clId="{3F8738D5-2550-AF4F-981D-A8C1866BE157}" dt="2026-03-12T06:53:43.418" v="106" actId="165"/>
-          <ac:cxnSpMkLst>
-            <pc:docMk/>
-            <pc:sldMk cId="3001053428" sldId="2147480764"/>
-            <ac:cxnSpMk id="27" creationId="{7C46F714-70A5-C921-7CCA-8693858A63E8}"/>
-          </ac:cxnSpMkLst>
-        </pc:cxnChg>
-      </pc:sldChg>
-    </pc:docChg>
-  </pc:docChgLst>
-  <pc:docChgLst>
     <pc:chgData name="福元 允亮" userId="12e1d508-426e-4c6a-b43b-7681266f9ca9" providerId="ADAL" clId="{677DA6F4-90AE-E448-B5D9-A10FB8393A34}"/>
     <pc:docChg chg="custSel modSld">
       <pc:chgData name="福元 允亮" userId="12e1d508-426e-4c6a-b43b-7681266f9ca9" providerId="ADAL" clId="{677DA6F4-90AE-E448-B5D9-A10FB8393A34}" dt="2026-03-12T04:36:20.054" v="169" actId="403"/>
@@ -397,6 +357,46 @@
             <ac:cxnSpMk id="27" creationId="{7C46F714-70A5-C921-7CCA-8693858A63E8}"/>
           </ac:cxnSpMkLst>
         </pc:cxnChg>
+      </pc:sldChg>
+    </pc:docChg>
+  </pc:docChgLst>
+  <pc:docChgLst>
+    <pc:chgData name="福元 允亮" userId="12e1d508-426e-4c6a-b43b-7681266f9ca9" providerId="ADAL" clId="{4FB9097D-FD44-E242-A68C-2137823CC664}"/>
+    <pc:docChg chg="undo custSel modSld">
+      <pc:chgData name="福元 允亮" userId="12e1d508-426e-4c6a-b43b-7681266f9ca9" providerId="ADAL" clId="{4FB9097D-FD44-E242-A68C-2137823CC664}" dt="2026-03-12T04:26:49.545" v="184" actId="120"/>
+      <pc:docMkLst>
+        <pc:docMk/>
+      </pc:docMkLst>
+      <pc:sldChg chg="addSp delSp modSp mod">
+        <pc:chgData name="福元 允亮" userId="12e1d508-426e-4c6a-b43b-7681266f9ca9" providerId="ADAL" clId="{4FB9097D-FD44-E242-A68C-2137823CC664}" dt="2026-03-12T04:26:49.545" v="184" actId="120"/>
+        <pc:sldMkLst>
+          <pc:docMk/>
+          <pc:sldMk cId="3001053428" sldId="2147480764"/>
+        </pc:sldMkLst>
+        <pc:spChg chg="mod">
+          <ac:chgData name="福元 允亮" userId="12e1d508-426e-4c6a-b43b-7681266f9ca9" providerId="ADAL" clId="{4FB9097D-FD44-E242-A68C-2137823CC664}" dt="2026-03-12T01:15:21.182" v="127" actId="948"/>
+          <ac:spMkLst>
+            <pc:docMk/>
+            <pc:sldMk cId="3001053428" sldId="2147480764"/>
+            <ac:spMk id="2" creationId="{BA5EF566-D16A-40BE-C039-67C80A2CFA91}"/>
+          </ac:spMkLst>
+        </pc:spChg>
+        <pc:spChg chg="mod">
+          <ac:chgData name="福元 允亮" userId="12e1d508-426e-4c6a-b43b-7681266f9ca9" providerId="ADAL" clId="{4FB9097D-FD44-E242-A68C-2137823CC664}" dt="2026-03-12T01:15:23.816" v="173" actId="20577"/>
+          <ac:spMkLst>
+            <pc:docMk/>
+            <pc:sldMk cId="3001053428" sldId="2147480764"/>
+            <ac:spMk id="3" creationId="{12D73F1F-49C9-5A45-B9E8-D6F68FC949FD}"/>
+          </ac:spMkLst>
+        </pc:spChg>
+        <pc:graphicFrameChg chg="add mod modVis">
+          <ac:chgData name="福元 允亮" userId="12e1d508-426e-4c6a-b43b-7681266f9ca9" providerId="ADAL" clId="{4FB9097D-FD44-E242-A68C-2137823CC664}" dt="2026-03-12T01:15:21.236" v="162"/>
+          <ac:graphicFrameMkLst>
+            <pc:docMk/>
+            <pc:sldMk cId="3001053428" sldId="2147480764"/>
+            <ac:graphicFrameMk id="8" creationId="{8B876925-78A3-0D6D-A136-2CE4548C6FDC}"/>
+          </ac:graphicFrameMkLst>
+        </pc:graphicFrameChg>
       </pc:sldChg>
     </pc:docChg>
   </pc:docChgLst>
@@ -489,7 +489,7 @@
               <a:rPr kumimoji="1" lang="ja-JP" altLang="en-US" smtClean="0">
                 <a:latin typeface="+mn-ea"/>
               </a:rPr>
-              <a:t>2026/3/19</a:t>
+              <a:t>2026/6/6</a:t>
             </a:fld>
             <a:endParaRPr kumimoji="1" lang="ja-JP" altLang="en-US">
               <a:latin typeface="+mn-ea"/>
@@ -663,7 +663,7 @@
           <a:p>
             <a:fld id="{187B8588-1665-0A4A-AD47-68FFFFC620D1}" type="datetimeFigureOut">
               <a:rPr kumimoji="1" lang="ja-JP" altLang="en-US" smtClean="0"/>
-              <a:t>2026/3/19</a:t>
+              <a:t>2026/6/6</a:t>
             </a:fld>
             <a:endParaRPr kumimoji="1" lang="ja-JP" altLang="en-US"/>
           </a:p>
@@ -2813,6 +2813,858 @@
           </a:p>
         </p:txBody>
       </p:sp>
+      <p:sp>
+        <p:nvSpPr>
+          <p:cNvPr id="4" name="SECTION_LEFT_TITLE"/>
+          <p:cNvSpPr txBox="1"/>
+          <p:nvPr/>
+        </p:nvSpPr>
+        <p:spPr>
+          <a:xfrm>
+            <a:off x="374904" y="1417320"/>
+            <a:ext cx="7040880" cy="274320"/>
+          </a:xfrm>
+          <a:prstGeom prst="rect">
+            <a:avLst/>
+          </a:prstGeom>
+          <a:noFill/>
+        </p:spPr>
+        <p:txBody>
+          <a:bodyPr wrap="square" lIns="0" tIns="0" rIns="0" bIns="0" anchor="t">
+            <a:spAutoFit/>
+          </a:bodyPr>
+          <a:lstStyle/>
+          <a:p>
+            <a:pPr algn="ctr"/>
+            <a:r>
+              <a:rPr lang="ja-JP" sz="1600" b="1">
+                <a:latin typeface="Meiryo UI"/>
+                <a:ea typeface="Meiryo UI"/>
+              </a:rPr>
+              <a:t>ポジショニングマップ</a:t>
+            </a:r>
+          </a:p>
+        </p:txBody>
+      </p:sp>
+      <p:sp>
+        <p:nvSpPr>
+          <p:cNvPr id="5" name="SECTION_LEFT_RULE"/>
+          <p:cNvSpPr/>
+          <p:nvPr/>
+        </p:nvSpPr>
+        <p:spPr>
+          <a:xfrm>
+            <a:off x="374904" y="1691640"/>
+            <a:ext cx="7040880" cy="18288"/>
+          </a:xfrm>
+          <a:prstGeom prst="rect">
+            <a:avLst/>
+          </a:prstGeom>
+          <a:solidFill>
+            <a:srgbClr val="333333"/>
+          </a:solidFill>
+          <a:ln>
+            <a:noFill/>
+          </a:ln>
+          <a:effectLst/>
+        </p:spPr>
+        <p:style>
+          <a:lnRef idx="1">
+            <a:schemeClr val="accent1"/>
+          </a:lnRef>
+          <a:fillRef idx="3">
+            <a:schemeClr val="accent1"/>
+          </a:fillRef>
+          <a:effectRef idx="2">
+            <a:schemeClr val="accent1"/>
+          </a:effectRef>
+          <a:fontRef idx="minor">
+            <a:schemeClr val="lt1"/>
+          </a:fontRef>
+        </p:style>
+        <p:txBody>
+          <a:bodyPr rtlCol="0" anchor="ctr"/>
+          <a:lstStyle/>
+          <a:p>
+            <a:pPr algn="ctr"/>
+            <a:endParaRPr/>
+          </a:p>
+        </p:txBody>
+      </p:sp>
+      <p:grpSp>
+        <p:nvGrpSpPr>
+          <p:cNvPr id="28" name="グループ化 27">
+            <a:extLst>
+              <a:ext uri="{FF2B5EF4-FFF2-40B4-BE49-F238E27FC236}">
+                <a16:creationId xmlns:a16="http://schemas.microsoft.com/office/drawing/2014/main" id="{8BD833D3-F58C-6792-C225-8064544F1144}"/>
+              </a:ext>
+            </a:extLst>
+          </p:cNvPr>
+          <p:cNvGrpSpPr/>
+          <p:nvPr/>
+        </p:nvGrpSpPr>
+        <p:grpSpPr>
+          <a:xfrm>
+            <a:off x="513180" y="2057400"/>
+            <a:ext cx="6675120" cy="4041648"/>
+            <a:chOff x="513180" y="2057400"/>
+            <a:chExt cx="6675120" cy="4041648"/>
+          </a:xfrm>
+        </p:grpSpPr>
+        <p:sp>
+          <p:nvSpPr>
+            <p:cNvPr id="6" name="MAP_FRAME"/>
+            <p:cNvSpPr/>
+            <p:nvPr/>
+          </p:nvSpPr>
+          <p:spPr>
+            <a:xfrm>
+              <a:off x="1016100" y="2057400"/>
+              <a:ext cx="6172200" cy="3520439"/>
+            </a:xfrm>
+            <a:prstGeom prst="rect">
+              <a:avLst/>
+            </a:prstGeom>
+            <a:solidFill>
+              <a:srgbClr val="FAFAFA"/>
+            </a:solidFill>
+            <a:ln w="12700">
+              <a:solidFill>
+                <a:srgbClr val="333333"/>
+              </a:solidFill>
+            </a:ln>
+            <a:effectLst/>
+          </p:spPr>
+          <p:style>
+            <a:lnRef idx="1">
+              <a:schemeClr val="accent1"/>
+            </a:lnRef>
+            <a:fillRef idx="3">
+              <a:schemeClr val="accent1"/>
+            </a:fillRef>
+            <a:effectRef idx="2">
+              <a:schemeClr val="accent1"/>
+            </a:effectRef>
+            <a:fontRef idx="minor">
+              <a:schemeClr val="lt1"/>
+            </a:fontRef>
+          </p:style>
+          <p:txBody>
+            <a:bodyPr rtlCol="0" anchor="ctr"/>
+            <a:lstStyle/>
+            <a:p>
+              <a:endParaRPr/>
+            </a:p>
+          </p:txBody>
+        </p:sp>
+        <p:cxnSp>
+          <p:nvCxnSpPr>
+            <p:cNvPr id="7" name="MAP_GUIDE_V"/>
+            <p:cNvCxnSpPr/>
+            <p:nvPr/>
+          </p:nvCxnSpPr>
+          <p:spPr>
+            <a:xfrm>
+              <a:off x="4102200" y="2057400"/>
+              <a:ext cx="0" cy="3520440"/>
+            </a:xfrm>
+            <a:prstGeom prst="line">
+              <a:avLst/>
+            </a:prstGeom>
+            <a:ln w="9525">
+              <a:solidFill>
+                <a:srgbClr val="C0C0C0"/>
+              </a:solidFill>
+              <a:prstDash val="dash"/>
+            </a:ln>
+          </p:spPr>
+          <p:style>
+            <a:lnRef idx="2">
+              <a:schemeClr val="accent1"/>
+            </a:lnRef>
+            <a:fillRef idx="0">
+              <a:schemeClr val="accent1"/>
+            </a:fillRef>
+            <a:effectRef idx="1">
+              <a:schemeClr val="accent1"/>
+            </a:effectRef>
+            <a:fontRef idx="minor">
+              <a:schemeClr val="tx1"/>
+            </a:fontRef>
+          </p:style>
+        </p:cxnSp>
+        <p:cxnSp>
+          <p:nvCxnSpPr>
+            <p:cNvPr id="8" name="MAP_GUIDE_H"/>
+            <p:cNvCxnSpPr/>
+            <p:nvPr/>
+          </p:nvCxnSpPr>
+          <p:spPr>
+            <a:xfrm>
+              <a:off x="1016100" y="3817620"/>
+              <a:ext cx="6172200" cy="0"/>
+            </a:xfrm>
+            <a:prstGeom prst="line">
+              <a:avLst/>
+            </a:prstGeom>
+            <a:ln w="9525">
+              <a:solidFill>
+                <a:srgbClr val="C0C0C0"/>
+              </a:solidFill>
+              <a:prstDash val="dash"/>
+            </a:ln>
+          </p:spPr>
+          <p:style>
+            <a:lnRef idx="2">
+              <a:schemeClr val="accent1"/>
+            </a:lnRef>
+            <a:fillRef idx="0">
+              <a:schemeClr val="accent1"/>
+            </a:fillRef>
+            <a:effectRef idx="1">
+              <a:schemeClr val="accent1"/>
+            </a:effectRef>
+            <a:fontRef idx="minor">
+              <a:schemeClr val="tx1"/>
+            </a:fontRef>
+          </p:style>
+        </p:cxnSp>
+        <p:sp>
+          <p:nvSpPr>
+            <p:cNvPr id="9" name="AXIS_X_LABEL"/>
+            <p:cNvSpPr txBox="1"/>
+            <p:nvPr/>
+          </p:nvSpPr>
+          <p:spPr>
+            <a:xfrm>
+              <a:off x="1016100" y="5870448"/>
+              <a:ext cx="6172200" cy="228600"/>
+            </a:xfrm>
+            <a:prstGeom prst="rect">
+              <a:avLst/>
+            </a:prstGeom>
+            <a:noFill/>
+          </p:spPr>
+          <p:txBody>
+            <a:bodyPr wrap="square" lIns="0" tIns="0" rIns="0" bIns="0" anchor="t">
+              <a:spAutoFit/>
+            </a:bodyPr>
+            <a:lstStyle/>
+            <a:p>
+              <a:pPr algn="ctr"/>
+              <a:r>
+                <a:rPr lang="ja-JP" sz="1400" b="1">
+                  <a:latin typeface="Meiryo UI"/>
+                  <a:ea typeface="Meiryo UI"/>
+                </a:rPr>
+                <a:t>（X軸ラベル）</a:t>
+              </a:r>
+            </a:p>
+          </p:txBody>
+        </p:sp>
+        <p:sp>
+          <p:nvSpPr>
+            <p:cNvPr id="10" name="AXIS_X_LOW"/>
+            <p:cNvSpPr txBox="1"/>
+            <p:nvPr/>
+          </p:nvSpPr>
+          <p:spPr>
+            <a:xfrm>
+              <a:off x="1016100" y="5623559"/>
+              <a:ext cx="1645920" cy="201168"/>
+            </a:xfrm>
+            <a:prstGeom prst="rect">
+              <a:avLst/>
+            </a:prstGeom>
+            <a:noFill/>
+          </p:spPr>
+          <p:txBody>
+            <a:bodyPr wrap="square" lIns="0" tIns="0" rIns="0" bIns="0" anchor="t">
+              <a:spAutoFit/>
+            </a:bodyPr>
+            <a:lstStyle/>
+            <a:p>
+              <a:pPr algn="l"/>
+              <a:r>
+                <a:rPr lang="ja-JP" sz="1100">
+                  <a:latin typeface="Meiryo UI"/>
+                  <a:ea typeface="Meiryo UI"/>
+                </a:rPr>
+                <a:t>← 低</a:t>
+              </a:r>
+            </a:p>
+          </p:txBody>
+        </p:sp>
+        <p:sp>
+          <p:nvSpPr>
+            <p:cNvPr id="11" name="AXIS_X_HIGH"/>
+            <p:cNvSpPr txBox="1"/>
+            <p:nvPr/>
+          </p:nvSpPr>
+          <p:spPr>
+            <a:xfrm>
+              <a:off x="5542380" y="5623559"/>
+              <a:ext cx="1645920" cy="201168"/>
+            </a:xfrm>
+            <a:prstGeom prst="rect">
+              <a:avLst/>
+            </a:prstGeom>
+            <a:noFill/>
+          </p:spPr>
+          <p:txBody>
+            <a:bodyPr wrap="square" lIns="0" tIns="0" rIns="0" bIns="0" anchor="t">
+              <a:spAutoFit/>
+            </a:bodyPr>
+            <a:lstStyle/>
+            <a:p>
+              <a:pPr algn="r"/>
+              <a:r>
+                <a:rPr lang="ja-JP" sz="1100">
+                  <a:latin typeface="Meiryo UI"/>
+                  <a:ea typeface="Meiryo UI"/>
+                </a:rPr>
+                <a:t>高 →</a:t>
+              </a:r>
+            </a:p>
+          </p:txBody>
+        </p:sp>
+        <p:sp>
+          <p:nvSpPr>
+            <p:cNvPr id="12" name="AXIS_Y_LABEL"/>
+            <p:cNvSpPr txBox="1"/>
+            <p:nvPr/>
+          </p:nvSpPr>
+          <p:spPr>
+            <a:xfrm rot="16200000">
+              <a:off x="-264060" y="3728405"/>
+              <a:ext cx="1828800" cy="274320"/>
+            </a:xfrm>
+            <a:prstGeom prst="rect">
+              <a:avLst/>
+            </a:prstGeom>
+            <a:noFill/>
+          </p:spPr>
+          <p:txBody>
+            <a:bodyPr wrap="square" lIns="0" tIns="0" rIns="0" bIns="0" anchor="ctr">
+              <a:spAutoFit/>
+            </a:bodyPr>
+            <a:lstStyle/>
+            <a:p>
+              <a:pPr algn="ctr"/>
+              <a:r>
+                <a:rPr lang="ja-JP" sz="1400" b="1">
+                  <a:latin typeface="Meiryo UI"/>
+                  <a:ea typeface="Meiryo UI"/>
+                </a:rPr>
+                <a:t>（Y軸ラベル）</a:t>
+              </a:r>
+            </a:p>
+          </p:txBody>
+        </p:sp>
+        <p:sp>
+          <p:nvSpPr>
+            <p:cNvPr id="13" name="AXIS_Y_HIGH"/>
+            <p:cNvSpPr txBox="1"/>
+            <p:nvPr/>
+          </p:nvSpPr>
+          <p:spPr>
+            <a:xfrm rot="16200000">
+              <a:off x="352938" y="2521402"/>
+              <a:ext cx="1097280" cy="169277"/>
+            </a:xfrm>
+            <a:prstGeom prst="rect">
+              <a:avLst/>
+            </a:prstGeom>
+            <a:noFill/>
+          </p:spPr>
+          <p:txBody>
+            <a:bodyPr wrap="square" lIns="0" tIns="0" rIns="0" bIns="0" anchor="ctr">
+              <a:spAutoFit/>
+            </a:bodyPr>
+            <a:lstStyle/>
+            <a:p>
+              <a:pPr algn="r"/>
+              <a:r>
+                <a:rPr lang="ja-JP" sz="1100">
+                  <a:latin typeface="Meiryo UI"/>
+                  <a:ea typeface="Meiryo UI"/>
+                </a:rPr>
+                <a:t>高 →</a:t>
+              </a:r>
+            </a:p>
+          </p:txBody>
+        </p:sp>
+        <p:sp>
+          <p:nvSpPr>
+            <p:cNvPr id="14" name="AXIS_Y_LOW"/>
+            <p:cNvSpPr txBox="1"/>
+            <p:nvPr/>
+          </p:nvSpPr>
+          <p:spPr>
+            <a:xfrm rot="16200000">
+              <a:off x="336992" y="4944560"/>
+              <a:ext cx="1097280" cy="169277"/>
+            </a:xfrm>
+            <a:prstGeom prst="rect">
+              <a:avLst/>
+            </a:prstGeom>
+            <a:noFill/>
+          </p:spPr>
+          <p:txBody>
+            <a:bodyPr wrap="square" lIns="0" tIns="0" rIns="0" bIns="0" anchor="ctr">
+              <a:spAutoFit/>
+            </a:bodyPr>
+            <a:lstStyle/>
+            <a:p>
+              <a:r>
+                <a:rPr lang="ja-JP" sz="1100">
+                  <a:latin typeface="Meiryo UI"/>
+                  <a:ea typeface="Meiryo UI"/>
+                </a:rPr>
+                <a:t>← 低</a:t>
+              </a:r>
+            </a:p>
+          </p:txBody>
+        </p:sp>
+        <p:sp>
+          <p:nvSpPr>
+            <p:cNvPr id="15" name="QUAD_TL"/>
+            <p:cNvSpPr txBox="1"/>
+            <p:nvPr/>
+          </p:nvSpPr>
+          <p:spPr>
+            <a:xfrm>
+              <a:off x="1125827" y="2167128"/>
+              <a:ext cx="2011680" cy="228600"/>
+            </a:xfrm>
+            <a:prstGeom prst="rect">
+              <a:avLst/>
+            </a:prstGeom>
+            <a:noFill/>
+          </p:spPr>
+          <p:txBody>
+            <a:bodyPr wrap="square" lIns="0" tIns="0" rIns="0" bIns="0" anchor="t">
+              <a:spAutoFit/>
+            </a:bodyPr>
+            <a:lstStyle/>
+            <a:p>
+              <a:pPr algn="l"/>
+              <a:r>
+                <a:rPr lang="ja-JP" sz="1200" i="1">
+                  <a:latin typeface="Meiryo UI"/>
+                  <a:ea typeface="Meiryo UI"/>
+                </a:rPr>
+                <a:t>（左上象限）</a:t>
+              </a:r>
+            </a:p>
+          </p:txBody>
+        </p:sp>
+        <p:sp>
+          <p:nvSpPr>
+            <p:cNvPr id="16" name="QUAD_TR"/>
+            <p:cNvSpPr txBox="1"/>
+            <p:nvPr/>
+          </p:nvSpPr>
+          <p:spPr>
+            <a:xfrm>
+              <a:off x="5066892" y="2167128"/>
+              <a:ext cx="2011680" cy="228600"/>
+            </a:xfrm>
+            <a:prstGeom prst="rect">
+              <a:avLst/>
+            </a:prstGeom>
+            <a:noFill/>
+          </p:spPr>
+          <p:txBody>
+            <a:bodyPr wrap="square" lIns="0" tIns="0" rIns="0" bIns="0" anchor="t">
+              <a:spAutoFit/>
+            </a:bodyPr>
+            <a:lstStyle/>
+            <a:p>
+              <a:pPr algn="r"/>
+              <a:r>
+                <a:rPr lang="ja-JP" sz="1200" i="1">
+                  <a:latin typeface="Meiryo UI"/>
+                  <a:ea typeface="Meiryo UI"/>
+                </a:rPr>
+                <a:t>（右上象限）</a:t>
+              </a:r>
+            </a:p>
+          </p:txBody>
+        </p:sp>
+        <p:sp>
+          <p:nvSpPr>
+            <p:cNvPr id="17" name="QUAD_BL"/>
+            <p:cNvSpPr txBox="1"/>
+            <p:nvPr/>
+          </p:nvSpPr>
+          <p:spPr>
+            <a:xfrm>
+              <a:off x="1125827" y="5276088"/>
+              <a:ext cx="2011680" cy="228600"/>
+            </a:xfrm>
+            <a:prstGeom prst="rect">
+              <a:avLst/>
+            </a:prstGeom>
+            <a:noFill/>
+          </p:spPr>
+          <p:txBody>
+            <a:bodyPr wrap="square" lIns="0" tIns="0" rIns="0" bIns="0" anchor="t">
+              <a:spAutoFit/>
+            </a:bodyPr>
+            <a:lstStyle/>
+            <a:p>
+              <a:pPr algn="l"/>
+              <a:r>
+                <a:rPr lang="ja-JP" sz="1200" i="1">
+                  <a:latin typeface="Meiryo UI"/>
+                  <a:ea typeface="Meiryo UI"/>
+                </a:rPr>
+                <a:t>（左下象限）</a:t>
+              </a:r>
+            </a:p>
+          </p:txBody>
+        </p:sp>
+        <p:sp>
+          <p:nvSpPr>
+            <p:cNvPr id="18" name="QUAD_BR"/>
+            <p:cNvSpPr txBox="1"/>
+            <p:nvPr/>
+          </p:nvSpPr>
+          <p:spPr>
+            <a:xfrm>
+              <a:off x="5066892" y="5276088"/>
+              <a:ext cx="2011680" cy="228600"/>
+            </a:xfrm>
+            <a:prstGeom prst="rect">
+              <a:avLst/>
+            </a:prstGeom>
+            <a:noFill/>
+          </p:spPr>
+          <p:txBody>
+            <a:bodyPr wrap="square" lIns="0" tIns="0" rIns="0" bIns="0" anchor="t">
+              <a:spAutoFit/>
+            </a:bodyPr>
+            <a:lstStyle/>
+            <a:p>
+              <a:pPr algn="r"/>
+              <a:r>
+                <a:rPr lang="ja-JP" sz="1200" i="1">
+                  <a:latin typeface="Meiryo UI"/>
+                  <a:ea typeface="Meiryo UI"/>
+                </a:rPr>
+                <a:t>（右下象限）</a:t>
+              </a:r>
+            </a:p>
+          </p:txBody>
+        </p:sp>
+      </p:grpSp>
+      <p:sp>
+        <p:nvSpPr>
+          <p:cNvPr id="19" name="IMPL_TITLE"/>
+          <p:cNvSpPr txBox="1"/>
+          <p:nvPr/>
+        </p:nvSpPr>
+        <p:spPr>
+          <a:xfrm>
+            <a:off x="7589520" y="1417320"/>
+            <a:ext cx="4251960" cy="274320"/>
+          </a:xfrm>
+          <a:prstGeom prst="rect">
+            <a:avLst/>
+          </a:prstGeom>
+          <a:noFill/>
+        </p:spPr>
+        <p:txBody>
+          <a:bodyPr wrap="square" lIns="0" tIns="0" rIns="0" bIns="0" anchor="t">
+            <a:spAutoFit/>
+          </a:bodyPr>
+          <a:lstStyle/>
+          <a:p>
+            <a:pPr algn="ctr"/>
+            <a:r>
+              <a:rPr lang="ja-JP" sz="1600" b="1">
+                <a:latin typeface="Meiryo UI"/>
+                <a:ea typeface="Meiryo UI"/>
+              </a:rPr>
+              <a:t>ポジショニングからの示唆</a:t>
+            </a:r>
+          </a:p>
+        </p:txBody>
+      </p:sp>
+      <p:sp>
+        <p:nvSpPr>
+          <p:cNvPr id="20" name="SECTION_RIGHT_RULE"/>
+          <p:cNvSpPr/>
+          <p:nvPr/>
+        </p:nvSpPr>
+        <p:spPr>
+          <a:xfrm>
+            <a:off x="7589520" y="1691640"/>
+            <a:ext cx="4251960" cy="18288"/>
+          </a:xfrm>
+          <a:prstGeom prst="rect">
+            <a:avLst/>
+          </a:prstGeom>
+          <a:solidFill>
+            <a:srgbClr val="333333"/>
+          </a:solidFill>
+          <a:ln>
+            <a:noFill/>
+          </a:ln>
+          <a:effectLst/>
+        </p:spPr>
+        <p:style>
+          <a:lnRef idx="1">
+            <a:schemeClr val="accent1"/>
+          </a:lnRef>
+          <a:fillRef idx="3">
+            <a:schemeClr val="accent1"/>
+          </a:fillRef>
+          <a:effectRef idx="2">
+            <a:schemeClr val="accent1"/>
+          </a:effectRef>
+          <a:fontRef idx="minor">
+            <a:schemeClr val="lt1"/>
+          </a:fontRef>
+        </p:style>
+        <p:txBody>
+          <a:bodyPr rtlCol="0" anchor="ctr"/>
+          <a:lstStyle/>
+          <a:p>
+            <a:pPr algn="ctr"/>
+            <a:endParaRPr/>
+          </a:p>
+        </p:txBody>
+      </p:sp>
+      <p:sp>
+        <p:nvSpPr>
+          <p:cNvPr id="21" name="IMPL_1"/>
+          <p:cNvSpPr txBox="1"/>
+          <p:nvPr/>
+        </p:nvSpPr>
+        <p:spPr>
+          <a:xfrm>
+            <a:off x="7635240" y="1874519"/>
+            <a:ext cx="4160520" cy="640080"/>
+          </a:xfrm>
+          <a:prstGeom prst="rect">
+            <a:avLst/>
+          </a:prstGeom>
+          <a:noFill/>
+        </p:spPr>
+        <p:txBody>
+          <a:bodyPr wrap="square" lIns="0" tIns="0" rIns="0" bIns="0" anchor="t">
+            <a:spAutoFit/>
+          </a:bodyPr>
+          <a:lstStyle/>
+          <a:p>
+            <a:pPr marL="220000" indent="-220000" algn="l">
+              <a:buClr>
+                <a:srgbClr val="2E4A6B"/>
+              </a:buClr>
+              <a:buFont typeface="Arial"/>
+              <a:buChar char="●"/>
+            </a:pPr>
+            <a:r>
+              <a:rPr lang="ja-JP" sz="1300">
+                <a:latin typeface="Meiryo UI"/>
+                <a:ea typeface="Meiryo UI"/>
+              </a:rPr>
+              <a:t>（示唆 1）</a:t>
+            </a:r>
+          </a:p>
+        </p:txBody>
+      </p:sp>
+      <p:sp>
+        <p:nvSpPr>
+          <p:cNvPr id="22" name="IMPL_2"/>
+          <p:cNvSpPr txBox="1"/>
+          <p:nvPr/>
+        </p:nvSpPr>
+        <p:spPr>
+          <a:xfrm>
+            <a:off x="7635240" y="2514600"/>
+            <a:ext cx="4160520" cy="640080"/>
+          </a:xfrm>
+          <a:prstGeom prst="rect">
+            <a:avLst/>
+          </a:prstGeom>
+          <a:noFill/>
+        </p:spPr>
+        <p:txBody>
+          <a:bodyPr wrap="square" lIns="0" tIns="0" rIns="0" bIns="0" anchor="t">
+            <a:spAutoFit/>
+          </a:bodyPr>
+          <a:lstStyle/>
+          <a:p>
+            <a:pPr marL="220000" indent="-220000" algn="l">
+              <a:buClr>
+                <a:srgbClr val="2E4A6B"/>
+              </a:buClr>
+              <a:buFont typeface="Arial"/>
+              <a:buChar char="●"/>
+            </a:pPr>
+            <a:r>
+              <a:rPr lang="ja-JP" sz="1300">
+                <a:latin typeface="Meiryo UI"/>
+                <a:ea typeface="Meiryo UI"/>
+              </a:rPr>
+              <a:t>（示唆 2）</a:t>
+            </a:r>
+          </a:p>
+        </p:txBody>
+      </p:sp>
+      <p:sp>
+        <p:nvSpPr>
+          <p:cNvPr id="23" name="IMPL_3"/>
+          <p:cNvSpPr txBox="1"/>
+          <p:nvPr/>
+        </p:nvSpPr>
+        <p:spPr>
+          <a:xfrm>
+            <a:off x="7635240" y="3154679"/>
+            <a:ext cx="4160520" cy="640080"/>
+          </a:xfrm>
+          <a:prstGeom prst="rect">
+            <a:avLst/>
+          </a:prstGeom>
+          <a:noFill/>
+        </p:spPr>
+        <p:txBody>
+          <a:bodyPr wrap="square" lIns="0" tIns="0" rIns="0" bIns="0" anchor="t">
+            <a:spAutoFit/>
+          </a:bodyPr>
+          <a:lstStyle/>
+          <a:p>
+            <a:pPr marL="220000" indent="-220000" algn="l">
+              <a:buClr>
+                <a:srgbClr val="2E4A6B"/>
+              </a:buClr>
+              <a:buFont typeface="Arial"/>
+              <a:buChar char="●"/>
+            </a:pPr>
+            <a:r>
+              <a:rPr lang="ja-JP" sz="1300">
+                <a:latin typeface="Meiryo UI"/>
+                <a:ea typeface="Meiryo UI"/>
+              </a:rPr>
+              <a:t>（示唆 3）</a:t>
+            </a:r>
+          </a:p>
+        </p:txBody>
+      </p:sp>
+      <p:sp>
+        <p:nvSpPr>
+          <p:cNvPr id="24" name="IMPL_4"/>
+          <p:cNvSpPr txBox="1"/>
+          <p:nvPr/>
+        </p:nvSpPr>
+        <p:spPr>
+          <a:xfrm>
+            <a:off x="7635240" y="3794759"/>
+            <a:ext cx="4160520" cy="640080"/>
+          </a:xfrm>
+          <a:prstGeom prst="rect">
+            <a:avLst/>
+          </a:prstGeom>
+          <a:noFill/>
+        </p:spPr>
+        <p:txBody>
+          <a:bodyPr wrap="square" lIns="0" tIns="0" rIns="0" bIns="0" anchor="t">
+            <a:spAutoFit/>
+          </a:bodyPr>
+          <a:lstStyle/>
+          <a:p>
+            <a:pPr marL="220000" indent="-220000" algn="l">
+              <a:buClr>
+                <a:srgbClr val="2E4A6B"/>
+              </a:buClr>
+              <a:buFont typeface="Arial"/>
+              <a:buChar char="●"/>
+            </a:pPr>
+            <a:r>
+              <a:rPr lang="ja-JP" sz="1300">
+                <a:latin typeface="Meiryo UI"/>
+                <a:ea typeface="Meiryo UI"/>
+              </a:rPr>
+              <a:t>（示唆 4）</a:t>
+            </a:r>
+          </a:p>
+        </p:txBody>
+      </p:sp>
+      <p:sp>
+        <p:nvSpPr>
+          <p:cNvPr id="25" name="IMPL_5"/>
+          <p:cNvSpPr txBox="1"/>
+          <p:nvPr/>
+        </p:nvSpPr>
+        <p:spPr>
+          <a:xfrm>
+            <a:off x="7635240" y="4434840"/>
+            <a:ext cx="4160520" cy="640080"/>
+          </a:xfrm>
+          <a:prstGeom prst="rect">
+            <a:avLst/>
+          </a:prstGeom>
+          <a:noFill/>
+        </p:spPr>
+        <p:txBody>
+          <a:bodyPr wrap="square" lIns="0" tIns="0" rIns="0" bIns="0" anchor="t">
+            <a:spAutoFit/>
+          </a:bodyPr>
+          <a:lstStyle/>
+          <a:p>
+            <a:pPr marL="220000" indent="-220000" algn="l">
+              <a:buClr>
+                <a:srgbClr val="2E4A6B"/>
+              </a:buClr>
+              <a:buFont typeface="Arial"/>
+              <a:buChar char="●"/>
+            </a:pPr>
+            <a:r>
+              <a:rPr lang="ja-JP" sz="1300">
+                <a:latin typeface="Meiryo UI"/>
+                <a:ea typeface="Meiryo UI"/>
+              </a:rPr>
+              <a:t>（示唆 5）</a:t>
+            </a:r>
+          </a:p>
+        </p:txBody>
+      </p:sp>
+      <p:sp>
+        <p:nvSpPr>
+          <p:cNvPr id="26" name="Source 3"/>
+          <p:cNvSpPr txBox="1"/>
+          <p:nvPr/>
+        </p:nvSpPr>
+        <p:spPr>
+          <a:xfrm>
+            <a:off x="374904" y="6336792"/>
+            <a:ext cx="11430000" cy="274320"/>
+          </a:xfrm>
+          <a:prstGeom prst="rect">
+            <a:avLst/>
+          </a:prstGeom>
+          <a:noFill/>
+        </p:spPr>
+        <p:txBody>
+          <a:bodyPr wrap="square" lIns="0" tIns="0" rIns="0" bIns="0" anchor="t">
+            <a:spAutoFit/>
+          </a:bodyPr>
+          <a:lstStyle/>
+          <a:p>
+            <a:pPr algn="l"/>
+            <a:r>
+              <a:rPr lang="ja-JP" sz="1000">
+                <a:latin typeface="Meiryo UI"/>
+                <a:ea typeface="Meiryo UI"/>
+              </a:rPr>
+              <a:t>出典：</a:t>
+            </a:r>
+          </a:p>
+        </p:txBody>
+      </p:sp>
     </p:spTree>
     <p:extLst>
       <p:ext uri="{BB962C8B-B14F-4D97-AF65-F5344CB8AC3E}">
@@ -2829,12 +3681,6 @@
 <file path=ppt/tags/tag1.xml><?xml version="1.0" encoding="utf-8"?>
 <p:tagLst xmlns:a="http://schemas.openxmlformats.org/drawingml/2006/main" xmlns:r="http://schemas.openxmlformats.org/officeDocument/2006/relationships" xmlns:p="http://schemas.openxmlformats.org/presentationml/2006/main">
   <p:tag name="THINKCELLPRESENTATIONDONOTDELETE" val="&lt;?xml version=&quot;1.0&quot; encoding=&quot;UTF-16&quot; standalone=&quot;yes&quot;?&gt;&lt;root reqver=&quot;28224&quot;&gt;&lt;version val=&quot;35829&quot;/&gt;&lt;CPresentation id=&quot;1&quot;&gt;&lt;m_precDefaultNumber&gt;&lt;m_yearfmt&gt;&lt;begin val=&quot;0&quot;/&gt;&lt;end val=&quot;4&quot;/&gt;&lt;/m_yearfmt&gt;&lt;/m_precDefaultNumber&gt;&lt;m_precDefaultPercent&gt;&lt;m_yearfmt&gt;&lt;begin val=&quot;0&quot;/&gt;&lt;end val=&quot;4&quot;/&gt;&lt;/m_yearfmt&gt;&lt;/m_precDefaultPercent&gt;&lt;m_precDefaultDate&gt;&lt;m_bNumberIsYear val=&quot;0&quot;/&gt;&lt;m_strFormatTime&gt;%d/%m/%Y&lt;/m_strFormatTime&gt;&lt;m_yearfmt&gt;&lt;begin val=&quot;0&quot;/&gt;&lt;end val=&quot;0&quot;/&gt;&lt;/m_yearfmt&gt;&lt;/m_precDefaultDate&gt;&lt;m_precDefaultDay&gt;&lt;m_bNumberIsYear val=&quot;0&quot;/&gt;&lt;m_strFormatTime&gt;%#d&lt;/m_strFormatTime&gt;&lt;m_yearfmt&gt;&lt;begin val=&quot;0&quot;/&gt;&lt;end val=&quot;4&quot;/&gt;&lt;/m_yearfmt&gt;&lt;/m_precDefaultDay&gt;&lt;m_precDefaultWeek&gt;&lt;m_bNumberIsYear val=&quot;0&quot;/&gt;&lt;m_strFormatTime&gt;%d.&lt;/m_strFormatTime&gt;&lt;m_yearfmt&gt;&lt;begin val=&quot;0&quot;/&gt;&lt;end val=&quot;4&quot;/&gt;&lt;/m_yearfmt&gt;&lt;/m_precDefaultWeek&gt;&lt;m_precDefaultMonth&gt;&lt;m_bNumberIsYear val=&quot;0&quot;/&gt;&lt;m_strFormatTime&gt;%1&lt;/m_strFormatTime&gt;&lt;m_yearfmt&gt;&lt;begin val=&quot;4&quot;/&gt;&lt;end val=&quot;4&quot;/&gt;&lt;/m_yearfmt&gt;&lt;/m_precDefaultMonth&gt;&lt;m_precDefaultQuarter&gt;&lt;m_bNumberIsYear val=&quot;0&quot;/&gt;&lt;m_strFormatTime&gt;Q%5&lt;/m_strFormatTime&gt;&lt;m_yearfmt&gt;&lt;begin val=&quot;0&quot;/&gt;&lt;end val=&quot;4&quot;/&gt;&lt;/m_yearfmt&gt;&lt;/m_precDefaultQuarter&gt;&lt;m_precDefaultYear&gt;&lt;m_bNumberIsYear val=&quot;0&quot;/&gt;&lt;m_strFormatTime&gt;%Y&lt;/m_strFormatTime&gt;&lt;m_yearfmt&gt;&lt;begin val=&quot;0&quot;/&gt;&lt;end val=&quot;0&quot;/&gt;&lt;/m_yearfmt&gt;&lt;/m_precDefaultYear&gt;&lt;m_precDefaultFYDay&gt;&lt;m_yearfmt&gt;&lt;begin val=&quot;0&quot;/&gt;&lt;end val=&quot;4&quot;/&gt;&lt;/m_yearfmt&gt;&lt;/m_precDefaultFYDay&gt;&lt;m_precDefaultFYWeek&gt;&lt;m_yearfmt&gt;&lt;begin val=&quot;0&quot;/&gt;&lt;end val=&quot;4&quot;/&gt;&lt;/m_yearfmt&gt;&lt;/m_precDefaultFYWeek&gt;&lt;m_precDefaultFYMonth&gt;&lt;m_yearfmt&gt;&lt;begin val=&quot;0&quot;/&gt;&lt;end val=&quot;4&quot;/&gt;&lt;/m_yearfmt&gt;&lt;/m_precDefaultFYMonth&gt;&lt;m_precDefaultFYQuarter&gt;&lt;m_yearfmt&gt;&lt;begin val=&quot;0&quot;/&gt;&lt;end val=&quot;4&quot;/&gt;&lt;/m_yearfmt&gt;&lt;/m_precDefaultFYQuarter&gt;&lt;m_precDefaultFYYear&gt;&lt;m_yearfmt&gt;&lt;begin val=&quot;0&quot;/&gt;&lt;end val=&quot;4&quot;/&gt;&lt;/m_yearfmt&gt;&lt;/m_precDefaultFYYear&gt;&lt;m_mruColor&gt;&lt;m_vecMRU length=&quot;0&quot;/&gt;&lt;/m_mruColor&gt;&lt;m_eweekdayFirstOfWeek val=&quot;2&quot;/&gt;&lt;m_eweekdayFirstOfWorkweek val=&quot;2&quot;/&gt;&lt;m_eweekdayFirstOfWeekend val=&quot;7&quot;/&gt;&lt;/CPresentation&gt;&lt;/root&gt;"/>
-</p:tagLst>
-</file>
-
-<file path=ppt/tags/tag2.xml><?xml version="1.0" encoding="utf-8"?>
-<p:tagLst xmlns:a="http://schemas.openxmlformats.org/drawingml/2006/main" xmlns:r="http://schemas.openxmlformats.org/officeDocument/2006/relationships" xmlns:p="http://schemas.openxmlformats.org/presentationml/2006/main">
-  <p:tag name="THINKCELLSHAPEDONOTDELETE" val="thinkcellActiveDocDoNotDelete"/>
 </p:tagLst>
 </file>
 
@@ -3703,6 +4549,7 @@
   </we:alternateReferences>
   <we:properties>
     <we:property name="Office.AutoShowTaskpaneWithDocument" value="true"/>
+    <we:property name="claude.fileId" value="&quot;36b1f1f5-742d-4649-a28f-679f29458af5&quot;"/>
   </we:properties>
   <we:bindings/>
   <we:snapshot xmlns:r="http://schemas.openxmlformats.org/officeDocument/2006/relationships"/>
@@ -3710,26 +4557,6 @@
 </file>
 
 <file path=customXml/item1.xml><?xml version="1.0" encoding="utf-8"?>
-<p:properties xmlns:p="http://schemas.microsoft.com/office/2006/metadata/properties" xmlns:xsi="http://www.w3.org/2001/XMLSchema-instance" xmlns:pc="http://schemas.microsoft.com/office/infopath/2007/PartnerControls">
-  <documentManagement>
-    <lcf76f155ced4ddcb4097134ff3c332f xmlns="17f56e19-48dc-4865-971f-f3b491f58a87">
-      <Terms xmlns="http://schemas.microsoft.com/office/infopath/2007/PartnerControls"/>
-    </lcf76f155ced4ddcb4097134ff3c332f>
-    <TaxCatchAll xmlns="0ae734c6-b731-48fe-9f9a-77498299e3e1" xsi:nil="true"/>
-  </documentManagement>
-</p:properties>
-</file>
-
-<file path=customXml/item2.xml><?xml version="1.0" encoding="utf-8"?>
-<?mso-contentType ?>
-<FormTemplates xmlns="http://schemas.microsoft.com/sharepoint/v3/contenttype/forms">
-  <Display>DocumentLibraryForm</Display>
-  <Edit>DocumentLibraryForm</Edit>
-  <New>DocumentLibraryForm</New>
-</FormTemplates>
-</file>
-
-<file path=customXml/item3.xml><?xml version="1.0" encoding="utf-8"?>
 <ct:contentTypeSchema xmlns:ct="http://schemas.microsoft.com/office/2006/metadata/contentType" xmlns:ma="http://schemas.microsoft.com/office/2006/metadata/properties/metaAttributes" ct:_="" ma:_="" ma:contentTypeName="Document" ma:contentTypeID="0x010100F389E5ACB7EEC446B5C0A053F7ABC581" ma:contentTypeVersion="12" ma:contentTypeDescription="Create a new document." ma:contentTypeScope="" ma:versionID="49a6381a5d329bcfaed59379faf28558">
   <xsd:schema xmlns:xsd="http://www.w3.org/2001/XMLSchema" xmlns:xs="http://www.w3.org/2001/XMLSchema" xmlns:p="http://schemas.microsoft.com/office/2006/metadata/properties" xmlns:ns2="17f56e19-48dc-4865-971f-f3b491f58a87" xmlns:ns3="0ae734c6-b731-48fe-9f9a-77498299e3e1" targetNamespace="http://schemas.microsoft.com/office/2006/metadata/properties" ma:root="true" ma:fieldsID="35126cdf82824cec3c7d4aa0c3dbcd07" ns2:_="" ns3:_="">
     <xsd:import namespace="17f56e19-48dc-4865-971f-f3b491f58a87"/>
@@ -3930,32 +4757,27 @@
 </ct:contentTypeSchema>
 </file>
 
-<file path=customXml/itemProps1.xml><?xml version="1.0" encoding="utf-8"?>
-<ds:datastoreItem xmlns:ds="http://schemas.openxmlformats.org/officeDocument/2006/customXml" ds:itemID="{50F19364-6506-4AE9-B1C7-2E3E6444FD05}">
-  <ds:schemaRefs>
-    <ds:schemaRef ds:uri="http://purl.org/dc/dcmitype/"/>
-    <ds:schemaRef ds:uri="http://schemas.microsoft.com/office/2006/documentManagement/types"/>
-    <ds:schemaRef ds:uri="http://purl.org/dc/elements/1.1/"/>
-    <ds:schemaRef ds:uri="http://purl.org/dc/terms/"/>
-    <ds:schemaRef ds:uri="17f56e19-48dc-4865-971f-f3b491f58a87"/>
-    <ds:schemaRef ds:uri="http://schemas.microsoft.com/office/infopath/2007/PartnerControls"/>
-    <ds:schemaRef ds:uri="http://schemas.openxmlformats.org/package/2006/metadata/core-properties"/>
-    <ds:schemaRef ds:uri="0ae734c6-b731-48fe-9f9a-77498299e3e1"/>
-    <ds:schemaRef ds:uri="http://schemas.microsoft.com/office/2006/metadata/properties"/>
-    <ds:schemaRef ds:uri="http://www.w3.org/XML/1998/namespace"/>
-  </ds:schemaRefs>
-</ds:datastoreItem>
+<file path=customXml/item2.xml><?xml version="1.0" encoding="utf-8"?>
+<?mso-contentType ?>
+<FormTemplates xmlns="http://schemas.microsoft.com/sharepoint/v3/contenttype/forms">
+  <Display>DocumentLibraryForm</Display>
+  <Edit>DocumentLibraryForm</Edit>
+  <New>DocumentLibraryForm</New>
+</FormTemplates>
 </file>
 
-<file path=customXml/itemProps2.xml><?xml version="1.0" encoding="utf-8"?>
-<ds:datastoreItem xmlns:ds="http://schemas.openxmlformats.org/officeDocument/2006/customXml" ds:itemID="{5548F579-53B8-4B8C-9F58-0D818877B6AD}">
-  <ds:schemaRefs>
-    <ds:schemaRef ds:uri="http://schemas.microsoft.com/sharepoint/v3/contenttype/forms"/>
-  </ds:schemaRefs>
-</ds:datastoreItem>
+<file path=customXml/item3.xml><?xml version="1.0" encoding="utf-8"?>
+<p:properties xmlns:p="http://schemas.microsoft.com/office/2006/metadata/properties" xmlns:xsi="http://www.w3.org/2001/XMLSchema-instance" xmlns:pc="http://schemas.microsoft.com/office/infopath/2007/PartnerControls">
+  <documentManagement>
+    <lcf76f155ced4ddcb4097134ff3c332f xmlns="17f56e19-48dc-4865-971f-f3b491f58a87">
+      <Terms xmlns="http://schemas.microsoft.com/office/infopath/2007/PartnerControls"/>
+    </lcf76f155ced4ddcb4097134ff3c332f>
+    <TaxCatchAll xmlns="0ae734c6-b731-48fe-9f9a-77498299e3e1" xsi:nil="true"/>
+  </documentManagement>
+</p:properties>
 </file>
 
-<file path=customXml/itemProps3.xml><?xml version="1.0" encoding="utf-8"?>
+<file path=customXml/itemProps1.xml><?xml version="1.0" encoding="utf-8"?>
 <ds:datastoreItem xmlns:ds="http://schemas.openxmlformats.org/officeDocument/2006/customXml" ds:itemID="{70B14AEB-52D7-4791-93EF-FC8A0B2FF5AD}">
   <ds:schemaRefs>
     <ds:schemaRef ds:uri="http://schemas.microsoft.com/office/2006/metadata/contentType"/>
@@ -3972,4 +4794,29 @@
     <ds:schemaRef ds:uri="http://schemas.microsoft.com/internal/obd"/>
   </ds:schemaRefs>
 </ds:datastoreItem>
+</file>
+
+<file path=customXml/itemProps2.xml><?xml version="1.0" encoding="utf-8"?>
+<ds:datastoreItem xmlns:ds="http://schemas.openxmlformats.org/officeDocument/2006/customXml" ds:itemID="{5548F579-53B8-4B8C-9F58-0D818877B6AD}">
+  <ds:schemaRefs>
+    <ds:schemaRef ds:uri="http://schemas.microsoft.com/sharepoint/v3/contenttype/forms"/>
+  </ds:schemaRefs>
+</ds:datastoreItem>
+</file>
+
+<file path=customXml/itemProps3.xml><?xml version="1.0" encoding="utf-8"?>
+<ds:datastoreItem xmlns:ds="http://schemas.openxmlformats.org/officeDocument/2006/customXml" ds:itemID="{50F19364-6506-4AE9-B1C7-2E3E6444FD05}">
+  <ds:schemaRefs>
+    <ds:schemaRef ds:uri="http://purl.org/dc/dcmitype/"/>
+    <ds:schemaRef ds:uri="http://schemas.microsoft.com/office/2006/documentManagement/types"/>
+    <ds:schemaRef ds:uri="http://purl.org/dc/elements/1.1/"/>
+    <ds:schemaRef ds:uri="http://purl.org/dc/terms/"/>
+    <ds:schemaRef ds:uri="17f56e19-48dc-4865-971f-f3b491f58a87"/>
+    <ds:schemaRef ds:uri="http://schemas.microsoft.com/office/infopath/2007/PartnerControls"/>
+    <ds:schemaRef ds:uri="http://schemas.openxmlformats.org/package/2006/metadata/core-properties"/>
+    <ds:schemaRef ds:uri="0ae734c6-b731-48fe-9f9a-77498299e3e1"/>
+    <ds:schemaRef ds:uri="http://schemas.microsoft.com/office/2006/metadata/properties"/>
+    <ds:schemaRef ds:uri="http://www.w3.org/XML/1998/namespace"/>
+  </ds:schemaRefs>
+</ds:datastoreItem>
 </file>